--- a/lectures/week10/lecture2/slides/week10_lecture2.pptx
+++ b/lectures/week10/lecture2/slides/week10_lecture2.pptx
@@ -6,7 +6,7 @@
   </p:sldMasterIdLst>
   <p:sldIdLst>
     <p:sldId id="256" r:id="rId2"/>
-    <p:sldId id="259" r:id="rId3"/>
+    <p:sldId id="386" r:id="rId3"/>
     <p:sldId id="326" r:id="rId4"/>
     <p:sldId id="335" r:id="rId5"/>
     <p:sldId id="338" r:id="rId6"/>
@@ -148,7 +148,7 @@
         <p14:section name="Default Section" id="{122D9F3D-F7CA-43FE-9E2E-5C007936740A}">
           <p14:sldIdLst>
             <p14:sldId id="256"/>
-            <p14:sldId id="259"/>
+            <p14:sldId id="386"/>
             <p14:sldId id="326"/>
             <p14:sldId id="335"/>
             <p14:sldId id="338"/>
@@ -7419,10 +7419,10 @@
       </p:sp>
       <p:sp>
         <p:nvSpPr>
-          <p:cNvPr id="6" name="Content Placeholder 2">
-            <a:extLst>
-              <a:ext uri="{FF2B5EF4-FFF2-40B4-BE49-F238E27FC236}">
-                <a16:creationId xmlns:a16="http://schemas.microsoft.com/office/drawing/2014/main" id="{98A44ACF-9048-B34C-4C33-5445ECA7F01A}"/>
+          <p:cNvPr id="3" name="Content Placeholder 2">
+            <a:extLst>
+              <a:ext uri="{FF2B5EF4-FFF2-40B4-BE49-F238E27FC236}">
+                <a16:creationId xmlns:a16="http://schemas.microsoft.com/office/drawing/2014/main" id="{7AB50049-8F6C-4DF3-BA59-31343B218CF3}"/>
               </a:ext>
             </a:extLst>
           </p:cNvPr>
@@ -7433,12 +7433,7 @@
             <p:ph idx="1"/>
           </p:nvPr>
         </p:nvSpPr>
-        <p:spPr>
-          <a:xfrm>
-            <a:off x="838200" y="1825624"/>
-            <a:ext cx="10515600" cy="4835479"/>
-          </a:xfrm>
-        </p:spPr>
+        <p:spPr/>
         <p:txBody>
           <a:bodyPr/>
           <a:lstStyle/>
@@ -7453,14 +7448,14 @@
                   <a:schemeClr val="accent1"/>
                 </a:solidFill>
               </a:rPr>
-              <a:t>9.1</a:t>
+              <a:t>10.1</a:t>
             </a:r>
           </a:p>
           <a:p>
             <a:pPr lvl="1"/>
             <a:r>
               <a:rPr lang="en-US" dirty="0"/>
-              <a:t>Cancelled</a:t>
+              <a:t>Objects, Classes, and Methods</a:t>
             </a:r>
           </a:p>
           <a:p>
@@ -7474,38 +7469,14 @@
                   <a:schemeClr val="accent1"/>
                 </a:solidFill>
               </a:rPr>
-              <a:t>9.2</a:t>
+              <a:t>10.2</a:t>
             </a:r>
           </a:p>
           <a:p>
             <a:pPr lvl="1"/>
             <a:r>
-              <a:rPr lang="en-US" dirty="0"/>
-              <a:t>objects</a:t>
-            </a:r>
-            <a:r>
-              <a:rPr lang="en-US" dirty="0">
-                <a:solidFill>
-                  <a:schemeClr val="accent2"/>
-                </a:solidFill>
-              </a:rPr>
-              <a:t>,</a:t>
-            </a:r>
-            <a:r>
-              <a:rPr lang="en-US" dirty="0"/>
-              <a:t> classes</a:t>
-            </a:r>
-            <a:r>
-              <a:rPr lang="en-US" dirty="0">
-                <a:solidFill>
-                  <a:schemeClr val="accent2"/>
-                </a:solidFill>
-              </a:rPr>
-              <a:t>,</a:t>
-            </a:r>
-            <a:r>
-              <a:rPr lang="en-US" dirty="0"/>
-              <a:t> and methods</a:t>
+              <a:rPr lang="en-US" b="1" dirty="0"/>
+              <a:t>Classes in Functions and Collections</a:t>
             </a:r>
           </a:p>
           <a:p>
@@ -7519,38 +7490,14 @@
                   <a:schemeClr val="accent1"/>
                 </a:solidFill>
               </a:rPr>
-              <a:t>9.3</a:t>
+              <a:t>10.3</a:t>
             </a:r>
           </a:p>
           <a:p>
             <a:pPr lvl="1"/>
             <a:r>
-              <a:rPr lang="en-US" b="1" dirty="0"/>
-              <a:t>Classes in Classes</a:t>
-            </a:r>
-            <a:r>
-              <a:rPr lang="en-US" b="1" dirty="0">
-                <a:solidFill>
-                  <a:schemeClr val="accent2"/>
-                </a:solidFill>
-              </a:rPr>
-              <a:t>,</a:t>
-            </a:r>
-            <a:r>
-              <a:rPr lang="en-US" b="1" dirty="0"/>
-              <a:t> Functions</a:t>
-            </a:r>
-            <a:r>
-              <a:rPr lang="en-US" b="1" dirty="0">
-                <a:solidFill>
-                  <a:schemeClr val="accent2"/>
-                </a:solidFill>
-              </a:rPr>
-              <a:t>,</a:t>
-            </a:r>
-            <a:r>
-              <a:rPr lang="en-US" b="1" dirty="0"/>
-              <a:t> and Collections</a:t>
+              <a:rPr lang="en-US" dirty="0"/>
+              <a:t>Design Problem: Wordle Part 2 </a:t>
             </a:r>
           </a:p>
           <a:p>
@@ -7565,7 +7512,7 @@
     </p:spTree>
     <p:extLst>
       <p:ext uri="{BB962C8B-B14F-4D97-AF65-F5344CB8AC3E}">
-        <p14:creationId xmlns:p14="http://schemas.microsoft.com/office/powerpoint/2010/main" val="2832463924"/>
+        <p14:creationId xmlns:p14="http://schemas.microsoft.com/office/powerpoint/2010/main" val="2200941188"/>
       </p:ext>
     </p:extLst>
   </p:cSld>
